--- a/docs/pitch/OPMC-Optimizely-Pitch.pptx
+++ b/docs/pitch/OPMC-Optimizely-Pitch.pptx
@@ -603,7 +603,7 @@
           <a:p>
             <a:r>
               <a:rPr lang="en-US" dirty="0"/>
-              <a:t>Opal's roadmap overlap is real, but it lives inside the editor ceiling. We are the depth layer beneath it: source-true authoring, certification, and the production bridge. MCP interop makes the complement concrete rather than aspirational.</a:t>
+              <a:t>Every quote is verbatim from Optimizely's current support documentation (July 2026). Opal runs on Gemini + Claude via Vertex; its authoring is editor-bound, its MCP excludes variation code, and its generated code is explicitly unsupported. We are the layer their own scope decisions left open.</a:t>
             </a:r>
             <a:endParaRPr lang="en-US" dirty="0"/>
           </a:p>
@@ -2882,7 +2882,7 @@
                 <a:ea typeface="Arial" pitchFamily="34" charset="-122"/>
                 <a:cs typeface="Arial" pitchFamily="34" charset="-120"/>
               </a:rPr>
-              <a:t>COMPLEMENTARY BY CONSTRUCTION</a:t>
+              <a:t>COMPLEMENTARY BY CONSTRUCTION — IN YOUR OWN WORDS</a:t>
             </a:r>
             <a:endParaRPr lang="en-US" sz="1100" dirty="0"/>
           </a:p>
@@ -2935,8 +2935,8 @@
         </p:nvSpPr>
         <p:spPr>
           <a:xfrm>
-            <a:off x="548640" y="1691640"/>
-            <a:ext cx="5431536" cy="2651760"/>
+            <a:off x="548640" y="1645920"/>
+            <a:ext cx="3621024" cy="2651760"/>
           </a:xfrm>
           <a:prstGeom prst="roundRect">
             <a:avLst>
@@ -2948,7 +2948,7 @@
           </a:solidFill>
           <a:ln w="12700">
             <a:solidFill>
-              <a:srgbClr val="18233B"/>
+              <a:srgbClr val="2A3A5E"/>
             </a:solidFill>
             <a:prstDash val="solid"/>
           </a:ln>
@@ -2962,24 +2962,24 @@
         </p:nvSpPr>
         <p:spPr>
           <a:xfrm>
-            <a:off x="868680" y="1920240"/>
-            <a:ext cx="4791456" cy="365760"/>
-          </a:xfrm>
-          <a:prstGeom prst="rect">
-            <a:avLst/>
-          </a:prstGeom>
-          <a:noFill/>
-          <a:ln/>
-        </p:spPr>
-        <p:txBody>
-          <a:bodyPr wrap="square" lIns="0" tIns="0" rIns="0" bIns="0" rtlCol="0" anchor="ctr"/>
-          <a:lstStyle/>
-          <a:p>
-            <a:pPr indent="0" marL="0">
-              <a:buNone/>
-            </a:pPr>
-            <a:r>
-              <a:rPr lang="en-US" sz="1700" b="1" dirty="0">
+            <a:off x="786384" y="1828800"/>
+            <a:ext cx="3145536" cy="1371600"/>
+          </a:xfrm>
+          <a:prstGeom prst="rect">
+            <a:avLst/>
+          </a:prstGeom>
+          <a:noFill/>
+          <a:ln/>
+        </p:spPr>
+        <p:txBody>
+          <a:bodyPr wrap="square" lIns="0" tIns="0" rIns="0" bIns="0" rtlCol="0" anchor="ctr"/>
+          <a:lstStyle/>
+          <a:p>
+            <a:pPr indent="0" marL="0">
+              <a:buNone/>
+            </a:pPr>
+            <a:r>
+              <a:rPr lang="en-US" sz="1300" i="1" dirty="0">
                 <a:solidFill>
                   <a:srgbClr val="C9D8F2"/>
                 </a:solidFill>
@@ -2987,9 +2987,9 @@
                 <a:ea typeface="Arial" pitchFamily="34" charset="-122"/>
                 <a:cs typeface="Arial" pitchFamily="34" charset="-120"/>
               </a:rPr>
-              <a:t>Opal today</a:t>
-            </a:r>
-            <a:endParaRPr lang="en-US" sz="1700" dirty="0"/>
+              <a:t>“The variation development agent is only available in the new Visual Editor.”</a:t>
+            </a:r>
+            <a:endParaRPr lang="en-US" sz="1300" dirty="0"/>
           </a:p>
         </p:txBody>
       </p:sp>
@@ -3001,28 +3001,24 @@
         </p:nvSpPr>
         <p:spPr>
           <a:xfrm>
-            <a:off x="868680" y="2423160"/>
-            <a:ext cx="4791456" cy="1737360"/>
-          </a:xfrm>
-          <a:prstGeom prst="rect">
-            <a:avLst/>
-          </a:prstGeom>
-          <a:noFill/>
-          <a:ln/>
-        </p:spPr>
-        <p:txBody>
-          <a:bodyPr wrap="square" lIns="0" tIns="0" rIns="0" bIns="0" rtlCol="0" anchor="ctr"/>
-          <a:lstStyle/>
-          <a:p>
-            <a:pPr marL="342900" indent="-342900">
-              <a:spcAft>
-                <a:spcPts val="1000"/>
-              </a:spcAft>
-              <a:buSzPct val="100000"/>
-              <a:buChar char="•"/>
-            </a:pPr>
-            <a:r>
-              <a:rPr lang="en-US" sz="1350" dirty="0">
+            <a:off x="786384" y="3246120"/>
+            <a:ext cx="3145536" cy="320040"/>
+          </a:xfrm>
+          <a:prstGeom prst="rect">
+            <a:avLst/>
+          </a:prstGeom>
+          <a:noFill/>
+          <a:ln/>
+        </p:spPr>
+        <p:txBody>
+          <a:bodyPr wrap="square" lIns="0" tIns="0" rIns="0" bIns="0" rtlCol="0" anchor="ctr"/>
+          <a:lstStyle/>
+          <a:p>
+            <a:pPr indent="0" marL="0">
+              <a:buNone/>
+            </a:pPr>
+            <a:r>
+              <a:rPr lang="en-US" sz="950" dirty="0">
                 <a:solidFill>
                   <a:srgbClr val="8CA0C4"/>
                 </a:solidFill>
@@ -3030,64 +3026,61 @@
                 <a:ea typeface="Arial" pitchFamily="34" charset="-122"/>
                 <a:cs typeface="Arial" pitchFamily="34" charset="-120"/>
               </a:rPr>
-              <a:t>Ideates, orchestrates, and generates — inside the visual-editor ceiling.</a:t>
-            </a:r>
-            <a:endParaRPr lang="en-US" sz="1350" dirty="0"/>
-          </a:p>
-          <a:p>
-            <a:pPr marL="342900" indent="-342900">
-              <a:spcAft>
-                <a:spcPts val="1000"/>
-              </a:spcAft>
-              <a:buSzPct val="100000"/>
-              <a:buChar char="•"/>
-            </a:pPr>
-            <a:r>
-              <a:rPr lang="en-US" sz="1350" dirty="0">
-                <a:solidFill>
-                  <a:srgbClr val="8CA0C4"/>
-                </a:solidFill>
-                <a:latin typeface="Arial" pitchFamily="34" charset="0"/>
-                <a:ea typeface="Arial" pitchFamily="34" charset="-122"/>
-                <a:cs typeface="Arial" pitchFamily="34" charset="-120"/>
-              </a:rPr>
-              <a:t>Output is client-side variations of editor-expressible changes.</a:t>
-            </a:r>
-            <a:endParaRPr lang="en-US" sz="1350" dirty="0"/>
-          </a:p>
-          <a:p>
-            <a:pPr marL="342900" indent="-342900">
-              <a:spcAft>
-                <a:spcPts val="1000"/>
-              </a:spcAft>
-              <a:buSzPct val="100000"/>
-              <a:buChar char="•"/>
-            </a:pPr>
-            <a:r>
-              <a:rPr lang="en-US" sz="1350" dirty="0">
-                <a:solidFill>
-                  <a:srgbClr val="8CA0C4"/>
-                </a:solidFill>
-                <a:latin typeface="Arial" pitchFamily="34" charset="0"/>
-                <a:ea typeface="Arial" pitchFamily="34" charset="-122"/>
-                <a:cs typeface="Arial" pitchFamily="34" charset="-120"/>
-              </a:rPr>
-              <a:t>No path from a winning variation to production source.</a:t>
-            </a:r>
-            <a:endParaRPr lang="en-US" sz="1350" dirty="0"/>
-          </a:p>
-        </p:txBody>
-      </p:sp>
-      <p:sp>
-        <p:nvSpPr>
-          <p:cNvPr id="7" name="Shape 5"/>
-          <p:cNvSpPr/>
-          <p:nvPr/>
-        </p:nvSpPr>
-        <p:spPr>
-          <a:xfrm>
-            <a:off x="6208776" y="1691640"/>
-            <a:ext cx="5431536" cy="2651760"/>
+              <a:t>Optimizely Support — AI variation development agent</a:t>
+            </a:r>
+            <a:endParaRPr lang="en-US" sz="950" dirty="0"/>
+          </a:p>
+        </p:txBody>
+      </p:sp>
+      <p:sp>
+        <p:nvSpPr>
+          <p:cNvPr id="7" name="Text 5"/>
+          <p:cNvSpPr/>
+          <p:nvPr/>
+        </p:nvSpPr>
+        <p:spPr>
+          <a:xfrm>
+            <a:off x="786384" y="3611880"/>
+            <a:ext cx="3145536" cy="548640"/>
+          </a:xfrm>
+          <a:prstGeom prst="rect">
+            <a:avLst/>
+          </a:prstGeom>
+          <a:noFill/>
+          <a:ln/>
+        </p:spPr>
+        <p:txBody>
+          <a:bodyPr wrap="square" lIns="0" tIns="0" rIns="0" bIns="0" rtlCol="0" anchor="ctr"/>
+          <a:lstStyle/>
+          <a:p>
+            <a:pPr indent="0" marL="0">
+              <a:buNone/>
+            </a:pPr>
+            <a:r>
+              <a:rPr lang="en-US" sz="1150" b="1" dirty="0">
+                <a:solidFill>
+                  <a:srgbClr val="4D8DFF"/>
+                </a:solidFill>
+                <a:latin typeface="Arial" pitchFamily="34" charset="0"/>
+                <a:ea typeface="Arial" pitchFamily="34" charset="-122"/>
+                <a:cs typeface="Arial" pitchFamily="34" charset="-120"/>
+              </a:rPr>
+              <a:t>Authoring lives inside the editor ceiling.</a:t>
+            </a:r>
+            <a:endParaRPr lang="en-US" sz="1150" dirty="0"/>
+          </a:p>
+        </p:txBody>
+      </p:sp>
+      <p:sp>
+        <p:nvSpPr>
+          <p:cNvPr id="8" name="Shape 6"/>
+          <p:cNvSpPr/>
+          <p:nvPr/>
+        </p:nvSpPr>
+        <p:spPr>
+          <a:xfrm>
+            <a:off x="4283964" y="1645920"/>
+            <a:ext cx="3621024" cy="2651760"/>
           </a:xfrm>
           <a:prstGeom prst="roundRect">
             <a:avLst>
@@ -3099,7 +3092,7 @@
           </a:solidFill>
           <a:ln w="12700">
             <a:solidFill>
-              <a:srgbClr val="4D8DFF"/>
+              <a:srgbClr val="2A3A5E"/>
             </a:solidFill>
             <a:prstDash val="solid"/>
           </a:ln>
@@ -3107,30 +3100,291 @@
       </p:sp>
       <p:sp>
         <p:nvSpPr>
-          <p:cNvPr id="8" name="Text 6"/>
-          <p:cNvSpPr/>
-          <p:nvPr/>
-        </p:nvSpPr>
-        <p:spPr>
-          <a:xfrm>
-            <a:off x="6528816" y="1920240"/>
-            <a:ext cx="4791456" cy="365760"/>
-          </a:xfrm>
-          <a:prstGeom prst="rect">
-            <a:avLst/>
-          </a:prstGeom>
-          <a:noFill/>
-          <a:ln/>
-        </p:spPr>
-        <p:txBody>
-          <a:bodyPr wrap="square" lIns="0" tIns="0" rIns="0" bIns="0" rtlCol="0" anchor="ctr"/>
-          <a:lstStyle/>
-          <a:p>
-            <a:pPr indent="0" marL="0">
-              <a:buNone/>
-            </a:pPr>
-            <a:r>
-              <a:rPr lang="en-US" sz="1700" b="1" dirty="0">
+          <p:cNvPr id="9" name="Text 7"/>
+          <p:cNvSpPr/>
+          <p:nvPr/>
+        </p:nvSpPr>
+        <p:spPr>
+          <a:xfrm>
+            <a:off x="4521708" y="1828800"/>
+            <a:ext cx="3145536" cy="1371600"/>
+          </a:xfrm>
+          <a:prstGeom prst="rect">
+            <a:avLst/>
+          </a:prstGeom>
+          <a:noFill/>
+          <a:ln/>
+        </p:spPr>
+        <p:txBody>
+          <a:bodyPr wrap="square" lIns="0" tIns="0" rIns="0" bIns="0" rtlCol="0" anchor="ctr"/>
+          <a:lstStyle/>
+          <a:p>
+            <a:pPr indent="0" marL="0">
+              <a:buNone/>
+            </a:pPr>
+            <a:r>
+              <a:rPr lang="en-US" sz="1300" i="1" dirty="0">
+                <a:solidFill>
+                  <a:srgbClr val="C9D8F2"/>
+                </a:solidFill>
+                <a:latin typeface="Arial" pitchFamily="34" charset="0"/>
+                <a:ea typeface="Arial" pitchFamily="34" charset="-122"/>
+                <a:cs typeface="Arial" pitchFamily="34" charset="-120"/>
+              </a:rPr>
+              <a:t>“Variation-level code changes (custom HTML, CSS, and JavaScript) are not supported through MCP. Instead, use the Visual Editor.”</a:t>
+            </a:r>
+            <a:endParaRPr lang="en-US" sz="1300" dirty="0"/>
+          </a:p>
+        </p:txBody>
+      </p:sp>
+      <p:sp>
+        <p:nvSpPr>
+          <p:cNvPr id="10" name="Text 8"/>
+          <p:cNvSpPr/>
+          <p:nvPr/>
+        </p:nvSpPr>
+        <p:spPr>
+          <a:xfrm>
+            <a:off x="4521708" y="3246120"/>
+            <a:ext cx="3145536" cy="320040"/>
+          </a:xfrm>
+          <a:prstGeom prst="rect">
+            <a:avLst/>
+          </a:prstGeom>
+          <a:noFill/>
+          <a:ln/>
+        </p:spPr>
+        <p:txBody>
+          <a:bodyPr wrap="square" lIns="0" tIns="0" rIns="0" bIns="0" rtlCol="0" anchor="ctr"/>
+          <a:lstStyle/>
+          <a:p>
+            <a:pPr indent="0" marL="0">
+              <a:buNone/>
+            </a:pPr>
+            <a:r>
+              <a:rPr lang="en-US" sz="950" dirty="0">
+                <a:solidFill>
+                  <a:srgbClr val="8CA0C4"/>
+                </a:solidFill>
+                <a:latin typeface="Arial" pitchFamily="34" charset="0"/>
+                <a:ea typeface="Arial" pitchFamily="34" charset="-122"/>
+                <a:cs typeface="Arial" pitchFamily="34" charset="-120"/>
+              </a:rPr>
+              <a:t>Optimizely Support — Experimentation MCP server</a:t>
+            </a:r>
+            <a:endParaRPr lang="en-US" sz="950" dirty="0"/>
+          </a:p>
+        </p:txBody>
+      </p:sp>
+      <p:sp>
+        <p:nvSpPr>
+          <p:cNvPr id="11" name="Text 9"/>
+          <p:cNvSpPr/>
+          <p:nvPr/>
+        </p:nvSpPr>
+        <p:spPr>
+          <a:xfrm>
+            <a:off x="4521708" y="3611880"/>
+            <a:ext cx="3145536" cy="548640"/>
+          </a:xfrm>
+          <a:prstGeom prst="rect">
+            <a:avLst/>
+          </a:prstGeom>
+          <a:noFill/>
+          <a:ln/>
+        </p:spPr>
+        <p:txBody>
+          <a:bodyPr wrap="square" lIns="0" tIns="0" rIns="0" bIns="0" rtlCol="0" anchor="ctr"/>
+          <a:lstStyle/>
+          <a:p>
+            <a:pPr indent="0" marL="0">
+              <a:buNone/>
+            </a:pPr>
+            <a:r>
+              <a:rPr lang="en-US" sz="1150" b="1" dirty="0">
+                <a:solidFill>
+                  <a:srgbClr val="4D8DFF"/>
+                </a:solidFill>
+                <a:latin typeface="Arial" pitchFamily="34" charset="0"/>
+                <a:ea typeface="Arial" pitchFamily="34" charset="-122"/>
+                <a:cs typeface="Arial" pitchFamily="34" charset="-120"/>
+              </a:rPr>
+              <a:t>Your own agent surface excludes variation code. We are the missing tool call.</a:t>
+            </a:r>
+            <a:endParaRPr lang="en-US" sz="1150" dirty="0"/>
+          </a:p>
+        </p:txBody>
+      </p:sp>
+      <p:sp>
+        <p:nvSpPr>
+          <p:cNvPr id="12" name="Shape 10"/>
+          <p:cNvSpPr/>
+          <p:nvPr/>
+        </p:nvSpPr>
+        <p:spPr>
+          <a:xfrm>
+            <a:off x="8019288" y="1645920"/>
+            <a:ext cx="3621024" cy="2651760"/>
+          </a:xfrm>
+          <a:prstGeom prst="roundRect">
+            <a:avLst>
+              <a:gd name="adj" fmla="val 3103"/>
+            </a:avLst>
+          </a:prstGeom>
+          <a:solidFill>
+            <a:srgbClr val="18233B"/>
+          </a:solidFill>
+          <a:ln w="12700">
+            <a:solidFill>
+              <a:srgbClr val="2A3A5E"/>
+            </a:solidFill>
+            <a:prstDash val="solid"/>
+          </a:ln>
+        </p:spPr>
+      </p:sp>
+      <p:sp>
+        <p:nvSpPr>
+          <p:cNvPr id="13" name="Text 11"/>
+          <p:cNvSpPr/>
+          <p:nvPr/>
+        </p:nvSpPr>
+        <p:spPr>
+          <a:xfrm>
+            <a:off x="8257032" y="1828800"/>
+            <a:ext cx="3145536" cy="1371600"/>
+          </a:xfrm>
+          <a:prstGeom prst="rect">
+            <a:avLst/>
+          </a:prstGeom>
+          <a:noFill/>
+          <a:ln/>
+        </p:spPr>
+        <p:txBody>
+          <a:bodyPr wrap="square" lIns="0" tIns="0" rIns="0" bIns="0" rtlCol="0" anchor="ctr"/>
+          <a:lstStyle/>
+          <a:p>
+            <a:pPr indent="0" marL="0">
+              <a:buNone/>
+            </a:pPr>
+            <a:r>
+              <a:rPr lang="en-US" sz="1300" i="1" dirty="0">
+                <a:solidFill>
+                  <a:srgbClr val="C9D8F2"/>
+                </a:solidFill>
+                <a:latin typeface="Arial" pitchFamily="34" charset="0"/>
+                <a:ea typeface="Arial" pitchFamily="34" charset="-122"/>
+                <a:cs typeface="Arial" pitchFamily="34" charset="-120"/>
+              </a:rPr>
+              <a:t>“Any code Opal generates is a custom code solution and falls outside the scope of Optimizely Support.”</a:t>
+            </a:r>
+            <a:endParaRPr lang="en-US" sz="1300" dirty="0"/>
+          </a:p>
+        </p:txBody>
+      </p:sp>
+      <p:sp>
+        <p:nvSpPr>
+          <p:cNvPr id="14" name="Text 12"/>
+          <p:cNvSpPr/>
+          <p:nvPr/>
+        </p:nvSpPr>
+        <p:spPr>
+          <a:xfrm>
+            <a:off x="8257032" y="3246120"/>
+            <a:ext cx="3145536" cy="320040"/>
+          </a:xfrm>
+          <a:prstGeom prst="rect">
+            <a:avLst/>
+          </a:prstGeom>
+          <a:noFill/>
+          <a:ln/>
+        </p:spPr>
+        <p:txBody>
+          <a:bodyPr wrap="square" lIns="0" tIns="0" rIns="0" bIns="0" rtlCol="0" anchor="ctr"/>
+          <a:lstStyle/>
+          <a:p>
+            <a:pPr indent="0" marL="0">
+              <a:buNone/>
+            </a:pPr>
+            <a:r>
+              <a:rPr lang="en-US" sz="950" dirty="0">
+                <a:solidFill>
+                  <a:srgbClr val="8CA0C4"/>
+                </a:solidFill>
+                <a:latin typeface="Arial" pitchFamily="34" charset="0"/>
+                <a:ea typeface="Arial" pitchFamily="34" charset="-122"/>
+                <a:cs typeface="Arial" pitchFamily="34" charset="-120"/>
+              </a:rPr>
+              <a:t>Optimizely Support — AI variation development agent</a:t>
+            </a:r>
+            <a:endParaRPr lang="en-US" sz="950" dirty="0"/>
+          </a:p>
+        </p:txBody>
+      </p:sp>
+      <p:sp>
+        <p:nvSpPr>
+          <p:cNvPr id="15" name="Text 13"/>
+          <p:cNvSpPr/>
+          <p:nvPr/>
+        </p:nvSpPr>
+        <p:spPr>
+          <a:xfrm>
+            <a:off x="8257032" y="3611880"/>
+            <a:ext cx="3145536" cy="548640"/>
+          </a:xfrm>
+          <a:prstGeom prst="rect">
+            <a:avLst/>
+          </a:prstGeom>
+          <a:noFill/>
+          <a:ln/>
+        </p:spPr>
+        <p:txBody>
+          <a:bodyPr wrap="square" lIns="0" tIns="0" rIns="0" bIns="0" rtlCol="0" anchor="ctr"/>
+          <a:lstStyle/>
+          <a:p>
+            <a:pPr indent="0" marL="0">
+              <a:buNone/>
+            </a:pPr>
+            <a:r>
+              <a:rPr lang="en-US" sz="1150" b="1" dirty="0">
+                <a:solidFill>
+                  <a:srgbClr val="2EE6A8"/>
+                </a:solidFill>
+                <a:latin typeface="Arial" pitchFamily="34" charset="0"/>
+                <a:ea typeface="Arial" pitchFamily="34" charset="-122"/>
+                <a:cs typeface="Arial" pitchFamily="34" charset="-120"/>
+              </a:rPr>
+              <a:t>Generated code is disclaimed. Ours is certified.</a:t>
+            </a:r>
+            <a:endParaRPr lang="en-US" sz="1150" dirty="0"/>
+          </a:p>
+        </p:txBody>
+      </p:sp>
+      <p:sp>
+        <p:nvSpPr>
+          <p:cNvPr id="16" name="Text 14"/>
+          <p:cNvSpPr/>
+          <p:nvPr/>
+        </p:nvSpPr>
+        <p:spPr>
+          <a:xfrm>
+            <a:off x="548640" y="4526280"/>
+            <a:ext cx="11091672" cy="365760"/>
+          </a:xfrm>
+          <a:prstGeom prst="rect">
+            <a:avLst/>
+          </a:prstGeom>
+          <a:noFill/>
+          <a:ln/>
+        </p:spPr>
+        <p:txBody>
+          <a:bodyPr wrap="square" lIns="0" tIns="0" rIns="0" bIns="0" rtlCol="0" anchor="ctr"/>
+          <a:lstStyle/>
+          <a:p>
+            <a:pPr indent="0" marL="0">
+              <a:buNone/>
+            </a:pPr>
+            <a:r>
+              <a:rPr lang="en-US" sz="1400" dirty="0">
                 <a:solidFill>
                   <a:srgbClr val="FFFFFF"/>
                 </a:solidFill>
@@ -3138,145 +3392,21 @@
                 <a:ea typeface="Arial" pitchFamily="34" charset="-122"/>
                 <a:cs typeface="Arial" pitchFamily="34" charset="-120"/>
               </a:rPr>
-              <a:t>Opal + the authoring layer</a:t>
-            </a:r>
-            <a:endParaRPr lang="en-US" sz="1700" dirty="0"/>
-          </a:p>
-        </p:txBody>
-      </p:sp>
-      <p:sp>
-        <p:nvSpPr>
-          <p:cNvPr id="9" name="Text 7"/>
-          <p:cNvSpPr/>
-          <p:nvPr/>
-        </p:nvSpPr>
-        <p:spPr>
-          <a:xfrm>
-            <a:off x="6528816" y="2423160"/>
-            <a:ext cx="4791456" cy="1737360"/>
-          </a:xfrm>
-          <a:prstGeom prst="rect">
-            <a:avLst/>
-          </a:prstGeom>
-          <a:noFill/>
-          <a:ln/>
-        </p:spPr>
-        <p:txBody>
-          <a:bodyPr wrap="square" lIns="0" tIns="0" rIns="0" bIns="0" rtlCol="0" anchor="ctr"/>
-          <a:lstStyle/>
-          <a:p>
-            <a:pPr marL="342900" indent="-342900">
-              <a:spcAft>
-                <a:spcPts val="1000"/>
-              </a:spcAft>
-              <a:buSzPct val="100000"/>
-              <a:buChar char="•"/>
-            </a:pPr>
-            <a:r>
-              <a:rPr lang="en-US" sz="1350" dirty="0">
-                <a:solidFill>
-                  <a:srgbClr val="C9D8F2"/>
-                </a:solidFill>
-                <a:latin typeface="Arial" pitchFamily="34" charset="0"/>
-                <a:ea typeface="Arial" pitchFamily="34" charset="-122"/>
-                <a:cs typeface="Arial" pitchFamily="34" charset="-120"/>
-              </a:rPr>
-              <a:t>Anything buildable in code — interactive, data-backed, design-system-true.</a:t>
-            </a:r>
-            <a:endParaRPr lang="en-US" sz="1350" dirty="0"/>
-          </a:p>
-          <a:p>
-            <a:pPr marL="342900" indent="-342900">
-              <a:spcAft>
-                <a:spcPts val="1000"/>
-              </a:spcAft>
-              <a:buSzPct val="100000"/>
-              <a:buChar char="•"/>
-            </a:pPr>
-            <a:r>
-              <a:rPr lang="en-US" sz="1350" dirty="0">
-                <a:solidFill>
-                  <a:srgbClr val="C9D8F2"/>
-                </a:solidFill>
-                <a:latin typeface="Arial" pitchFamily="34" charset="0"/>
-                <a:ea typeface="Arial" pitchFamily="34" charset="-122"/>
-                <a:cs typeface="Arial" pitchFamily="34" charset="-120"/>
-              </a:rPr>
-              <a:t>Every variation certified before it ships. Every ship API-verified.</a:t>
-            </a:r>
-            <a:endParaRPr lang="en-US" sz="1350" dirty="0"/>
-          </a:p>
-          <a:p>
-            <a:pPr marL="342900" indent="-342900">
-              <a:spcAft>
-                <a:spcPts val="1000"/>
-              </a:spcAft>
-              <a:buSzPct val="100000"/>
-              <a:buChar char="•"/>
-            </a:pPr>
-            <a:r>
-              <a:rPr lang="en-US" sz="1350" dirty="0">
-                <a:solidFill>
-                  <a:srgbClr val="C9D8F2"/>
-                </a:solidFill>
-                <a:latin typeface="Arial" pitchFamily="34" charset="0"/>
-                <a:ea typeface="Arial" pitchFamily="34" charset="-122"/>
-                <a:cs typeface="Arial" pitchFamily="34" charset="-120"/>
-              </a:rPr>
-              <a:t>Winners graduate into pull requests in the customer's own repo.</a:t>
-            </a:r>
-            <a:endParaRPr lang="en-US" sz="1350" dirty="0"/>
-          </a:p>
-        </p:txBody>
-      </p:sp>
-      <p:sp>
-        <p:nvSpPr>
-          <p:cNvPr id="10" name="Text 8"/>
-          <p:cNvSpPr/>
-          <p:nvPr/>
-        </p:nvSpPr>
-        <p:spPr>
-          <a:xfrm>
-            <a:off x="548640" y="4617720"/>
-            <a:ext cx="5486400" cy="320040"/>
-          </a:xfrm>
-          <a:prstGeom prst="rect">
-            <a:avLst/>
-          </a:prstGeom>
-          <a:noFill/>
-          <a:ln/>
-        </p:spPr>
-        <p:txBody>
-          <a:bodyPr wrap="square" lIns="0" tIns="0" rIns="0" bIns="0" rtlCol="0" anchor="ctr"/>
-          <a:lstStyle/>
-          <a:p>
-            <a:pPr indent="0" marL="0">
-              <a:buNone/>
-            </a:pPr>
-            <a:r>
-              <a:rPr lang="en-US" sz="1300" b="1" dirty="0">
-                <a:solidFill>
-                  <a:srgbClr val="FFFFFF"/>
-                </a:solidFill>
-                <a:latin typeface="Arial" pitchFamily="34" charset="0"/>
-                <a:ea typeface="Arial" pitchFamily="34" charset="-122"/>
-                <a:cs typeface="Arial" pitchFamily="34" charset="-120"/>
-              </a:rPr>
-              <a:t>The integration writes itself:</a:t>
-            </a:r>
-            <a:endParaRPr lang="en-US" sz="1300" dirty="0"/>
-          </a:p>
-        </p:txBody>
-      </p:sp>
-      <p:sp>
-        <p:nvSpPr>
-          <p:cNvPr id="11" name="Shape 9"/>
-          <p:cNvSpPr/>
-          <p:nvPr/>
-        </p:nvSpPr>
-        <p:spPr>
-          <a:xfrm>
-            <a:off x="548640" y="5029200"/>
+              <a:t>Opal orchestrates and ideates. We are the depth layer its own documentation scopes out — and the integration writes itself:</a:t>
+            </a:r>
+            <a:endParaRPr lang="en-US" sz="1400" dirty="0"/>
+          </a:p>
+        </p:txBody>
+      </p:sp>
+      <p:sp>
+        <p:nvSpPr>
+          <p:cNvPr id="17" name="Shape 15"/>
+          <p:cNvSpPr/>
+          <p:nvPr/>
+        </p:nvSpPr>
+        <p:spPr>
+          <a:xfrm>
+            <a:off x="548640" y="4983480"/>
             <a:ext cx="2724912" cy="868680"/>
           </a:xfrm>
           <a:prstGeom prst="roundRect">
@@ -3297,13 +3427,13 @@
       </p:sp>
       <p:sp>
         <p:nvSpPr>
-          <p:cNvPr id="12" name="Text 10"/>
-          <p:cNvSpPr/>
-          <p:nvPr/>
-        </p:nvSpPr>
-        <p:spPr>
-          <a:xfrm>
-            <a:off x="713232" y="5029200"/>
+          <p:cNvPr id="18" name="Text 16"/>
+          <p:cNvSpPr/>
+          <p:nvPr/>
+        </p:nvSpPr>
+        <p:spPr>
+          <a:xfrm>
+            <a:off x="713232" y="4983480"/>
             <a:ext cx="2395728" cy="868680"/>
           </a:xfrm>
           <a:prstGeom prst="rect">
@@ -3336,13 +3466,13 @@
       </p:sp>
       <p:sp>
         <p:nvSpPr>
-          <p:cNvPr id="13" name="Shape 11"/>
-          <p:cNvSpPr/>
-          <p:nvPr/>
-        </p:nvSpPr>
-        <p:spPr>
-          <a:xfrm>
-            <a:off x="3364992" y="5029200"/>
+          <p:cNvPr id="19" name="Shape 17"/>
+          <p:cNvSpPr/>
+          <p:nvPr/>
+        </p:nvSpPr>
+        <p:spPr>
+          <a:xfrm>
+            <a:off x="3364992" y="4983480"/>
             <a:ext cx="2724912" cy="868680"/>
           </a:xfrm>
           <a:prstGeom prst="roundRect">
@@ -3363,13 +3493,13 @@
       </p:sp>
       <p:sp>
         <p:nvSpPr>
-          <p:cNvPr id="14" name="Text 12"/>
-          <p:cNvSpPr/>
-          <p:nvPr/>
-        </p:nvSpPr>
-        <p:spPr>
-          <a:xfrm>
-            <a:off x="3529584" y="5029200"/>
+          <p:cNvPr id="20" name="Text 18"/>
+          <p:cNvSpPr/>
+          <p:nvPr/>
+        </p:nvSpPr>
+        <p:spPr>
+          <a:xfrm>
+            <a:off x="3529584" y="4983480"/>
             <a:ext cx="2395728" cy="868680"/>
           </a:xfrm>
           <a:prstGeom prst="rect">
@@ -3402,13 +3532,13 @@
       </p:sp>
       <p:sp>
         <p:nvSpPr>
-          <p:cNvPr id="15" name="Shape 13"/>
-          <p:cNvSpPr/>
-          <p:nvPr/>
-        </p:nvSpPr>
-        <p:spPr>
-          <a:xfrm>
-            <a:off x="6181344" y="5029200"/>
+          <p:cNvPr id="21" name="Shape 19"/>
+          <p:cNvSpPr/>
+          <p:nvPr/>
+        </p:nvSpPr>
+        <p:spPr>
+          <a:xfrm>
+            <a:off x="6181344" y="4983480"/>
             <a:ext cx="2724912" cy="868680"/>
           </a:xfrm>
           <a:prstGeom prst="roundRect">
@@ -3429,13 +3559,13 @@
       </p:sp>
       <p:sp>
         <p:nvSpPr>
-          <p:cNvPr id="16" name="Text 14"/>
-          <p:cNvSpPr/>
-          <p:nvPr/>
-        </p:nvSpPr>
-        <p:spPr>
-          <a:xfrm>
-            <a:off x="6345936" y="5029200"/>
+          <p:cNvPr id="22" name="Text 20"/>
+          <p:cNvSpPr/>
+          <p:nvPr/>
+        </p:nvSpPr>
+        <p:spPr>
+          <a:xfrm>
+            <a:off x="6345936" y="4983480"/>
             <a:ext cx="2395728" cy="868680"/>
           </a:xfrm>
           <a:prstGeom prst="rect">
@@ -3468,13 +3598,13 @@
       </p:sp>
       <p:sp>
         <p:nvSpPr>
-          <p:cNvPr id="17" name="Shape 15"/>
-          <p:cNvSpPr/>
-          <p:nvPr/>
-        </p:nvSpPr>
-        <p:spPr>
-          <a:xfrm>
-            <a:off x="8997696" y="5029200"/>
+          <p:cNvPr id="23" name="Shape 21"/>
+          <p:cNvSpPr/>
+          <p:nvPr/>
+        </p:nvSpPr>
+        <p:spPr>
+          <a:xfrm>
+            <a:off x="8997696" y="4983480"/>
             <a:ext cx="2724912" cy="868680"/>
           </a:xfrm>
           <a:prstGeom prst="roundRect">
@@ -3495,13 +3625,13 @@
       </p:sp>
       <p:sp>
         <p:nvSpPr>
-          <p:cNvPr id="18" name="Text 16"/>
-          <p:cNvSpPr/>
-          <p:nvPr/>
-        </p:nvSpPr>
-        <p:spPr>
-          <a:xfrm>
-            <a:off x="9162288" y="5029200"/>
+          <p:cNvPr id="24" name="Text 22"/>
+          <p:cNvSpPr/>
+          <p:nvPr/>
+        </p:nvSpPr>
+        <p:spPr>
+          <a:xfrm>
+            <a:off x="9162288" y="4983480"/>
             <a:ext cx="2395728" cy="868680"/>
           </a:xfrm>
           <a:prstGeom prst="rect">
@@ -3529,6 +3659,45 @@
               <a:t>Opal calls our agents over MCP</a:t>
             </a:r>
             <a:endParaRPr lang="en-US" sz="1150" dirty="0"/>
+          </a:p>
+        </p:txBody>
+      </p:sp>
+      <p:sp>
+        <p:nvSpPr>
+          <p:cNvPr id="25" name="Text 23"/>
+          <p:cNvSpPr/>
+          <p:nvPr/>
+        </p:nvSpPr>
+        <p:spPr>
+          <a:xfrm>
+            <a:off x="548640" y="6126480"/>
+            <a:ext cx="7315200" cy="274320"/>
+          </a:xfrm>
+          <a:prstGeom prst="rect">
+            <a:avLst/>
+          </a:prstGeom>
+          <a:noFill/>
+          <a:ln/>
+        </p:spPr>
+        <p:txBody>
+          <a:bodyPr wrap="square" lIns="0" tIns="0" rIns="0" bIns="0" rtlCol="0" anchor="ctr"/>
+          <a:lstStyle/>
+          <a:p>
+            <a:pPr indent="0" marL="0">
+              <a:buNone/>
+            </a:pPr>
+            <a:r>
+              <a:rPr lang="en-US" sz="1000" dirty="0">
+                <a:solidFill>
+                  <a:srgbClr val="8CA0C4"/>
+                </a:solidFill>
+                <a:latin typeface="Arial" pitchFamily="34" charset="0"/>
+                <a:ea typeface="Arial" pitchFamily="34" charset="-122"/>
+                <a:cs typeface="Arial" pitchFamily="34" charset="-120"/>
+              </a:rPr>
+              <a:t>Full analysis with sources: docs/OPAL-GAP-ANALYSIS.md</a:t>
+            </a:r>
+            <a:endParaRPr lang="en-US" sz="1000" dirty="0"/>
           </a:p>
         </p:txBody>
       </p:sp>
